--- a/Schools_ML_Track/camp_2026/slides/DA/DA08.pptx
+++ b/Schools_ML_Track/camp_2026/slides/DA/DA08.pptx
@@ -129,7 +129,7 @@
   <p:extLst>
     <p:ext uri="{521415D9-36F7-43E2-AB2F-B90AF26B5E84}">
       <p14:sectionLst xmlns:p14="http://schemas.microsoft.com/office/powerpoint/2010/main">
-        <p14:section name="Opening" id="{7b22991c-d600-f203-499c-220742fe794d}">
+        <p14:section name="Opening" id="{017d1163-9e83-738d-7789-ee39af0f3492}">
           <p14:sldIdLst>
             <p14:sldId id="256"/>
             <p14:sldId id="257"/>
@@ -140,7 +140,7 @@
             <p14:sldId id="262"/>
           </p14:sldIdLst>
         </p14:section>
-        <p14:section name="Block A" id="{5bfc6d8a-562d-2964-bf54-c1c58911fa18}">
+        <p14:section name="Block A" id="{01b2d9c0-afe6-9705-cb2e-4281c03ac747}">
           <p14:sldIdLst>
             <p14:sldId id="263"/>
             <p14:sldId id="264"/>
@@ -150,15 +150,15 @@
             <p14:sldId id="269"/>
           </p14:sldIdLst>
         </p14:section>
-        <p14:section name="Break" id="{7e5da0f2-21cb-c5a6-3afa-81c563ca5fde}">
+        <p14:section name="Break" id="{363a453a-1e3f-6ac2-d9d9-a786c73934f4}">
           <p14:sldIdLst>
             <p14:sldId id="267"/>
           </p14:sldIdLst>
         </p14:section>
-        <p14:section name="Block A" id="{6612f496-cd8a-246d-6141-96a7b4a244d6}">
+        <p14:section name="Block A" id="{cef67348-7f42-9270-c2d1-65cd8b6147c3}">
           <p14:sldIdLst/>
         </p14:section>
-        <p14:section name="Block B" id="{7bbb2a23-c6fb-0ab4-fa25-020ab895a987}">
+        <p14:section name="Block B" id="{916baa3f-f188-49b8-0f90-b1e0f133b957}">
           <p14:sldIdLst>
             <p14:sldId id="270"/>
             <p14:sldId id="271"/>
@@ -168,7 +168,7 @@
             <p14:sldId id="275"/>
           </p14:sldIdLst>
         </p14:section>
-        <p14:section name="Make and close" id="{4d67e695-ca0f-e303-2843-a195dd8873b6}">
+        <p14:section name="Make and close" id="{c70f6958-c663-d45a-bc00-20dc2a6b0ea4}">
           <p14:sldIdLst>
             <p14:sldId id="276"/>
             <p14:sldId id="277"/>

--- a/Schools_ML_Track/camp_2026/slides/DA/DA08.pptx
+++ b/Schools_ML_Track/camp_2026/slides/DA/DA08.pptx
@@ -129,7 +129,7 @@
   <p:extLst>
     <p:ext uri="{521415D9-36F7-43E2-AB2F-B90AF26B5E84}">
       <p14:sectionLst xmlns:p14="http://schemas.microsoft.com/office/powerpoint/2010/main">
-        <p14:section name="Opening" id="{017d1163-9e83-738d-7789-ee39af0f3492}">
+        <p14:section name="Opening" id="{767d4271-9d27-2347-3e46-5c24118590fc}">
           <p14:sldIdLst>
             <p14:sldId id="256"/>
             <p14:sldId id="257"/>
@@ -140,7 +140,7 @@
             <p14:sldId id="262"/>
           </p14:sldIdLst>
         </p14:section>
-        <p14:section name="Block A" id="{01b2d9c0-afe6-9705-cb2e-4281c03ac747}">
+        <p14:section name="Block A" id="{3e412af9-13c9-8728-fe20-730f11e39d77}">
           <p14:sldIdLst>
             <p14:sldId id="263"/>
             <p14:sldId id="264"/>
@@ -150,15 +150,15 @@
             <p14:sldId id="269"/>
           </p14:sldIdLst>
         </p14:section>
-        <p14:section name="Break" id="{363a453a-1e3f-6ac2-d9d9-a786c73934f4}">
+        <p14:section name="Break" id="{ee1c6650-ed1f-8c9f-7260-8ccdcefcbe69}">
           <p14:sldIdLst>
             <p14:sldId id="267"/>
           </p14:sldIdLst>
         </p14:section>
-        <p14:section name="Block A" id="{cef67348-7f42-9270-c2d1-65cd8b6147c3}">
+        <p14:section name="Block A" id="{cbba5735-a281-07dc-2c99-053737847274}">
           <p14:sldIdLst/>
         </p14:section>
-        <p14:section name="Block B" id="{916baa3f-f188-49b8-0f90-b1e0f133b957}">
+        <p14:section name="Block B" id="{bfa1e35b-b9d8-40df-44c2-a04803bbab5e}">
           <p14:sldIdLst>
             <p14:sldId id="270"/>
             <p14:sldId id="271"/>
@@ -168,7 +168,7 @@
             <p14:sldId id="275"/>
           </p14:sldIdLst>
         </p14:section>
-        <p14:section name="Make and close" id="{c70f6958-c663-d45a-bc00-20dc2a6b0ea4}">
+        <p14:section name="Make and close" id="{4942e220-27fb-e655-f6a5-4dd439d34a08}">
           <p14:sldIdLst>
             <p14:sldId id="276"/>
             <p14:sldId id="277"/>
@@ -3288,7 +3288,24 @@
                 <a:ea typeface="Lato" pitchFamily="34" charset="-122"/>
                 <a:cs typeface="Lato" pitchFamily="34" charset="-120"/>
               </a:rPr>
-              <a:t>Select, filter and calculate a revenue column</a:t>
+              <a:t>Select, filter and calculate</a:t>
+            </a:r>
+            <a:endParaRPr lang="en-US" sz="5600" dirty="0"/>
+          </a:p>
+          <a:p>
+            <a:pPr algn="l" indent="0" marL="0">
+              <a:buNone/>
+            </a:pPr>
+            <a:r>
+              <a:rPr lang="en-US" sz="5600" b="1" dirty="0">
+                <a:solidFill>
+                  <a:srgbClr val="FFFFFF"/>
+                </a:solidFill>
+                <a:latin typeface="Lato" pitchFamily="34" charset="0"/>
+                <a:ea typeface="Lato" pitchFamily="34" charset="-122"/>
+                <a:cs typeface="Lato" pitchFamily="34" charset="-120"/>
+              </a:rPr>
+              <a:t>a revenue column</a:t>
             </a:r>
             <a:endParaRPr lang="en-US" sz="5600" dirty="0"/>
           </a:p>
@@ -5497,269 +5514,30 @@
           </a:p>
         </p:txBody>
       </p:sp>
-      <p:sp>
-        <p:nvSpPr>
-          <p:cNvPr id="4" name="Shape 2"/>
-          <p:cNvSpPr/>
+      <p:pic>
+        <p:nvPicPr>
+          <p:cNvPr id="4" name="Image 0" descr="Change one thing">    </p:cNvPr>
+          <p:cNvPicPr>
+            <a:picLocks noChangeAspect="1"/>
+          </p:cNvPicPr>
           <p:nvPr/>
-        </p:nvSpPr>
-        <p:spPr>
-          <a:xfrm>
-            <a:off x="7223760" y="1737360"/>
-            <a:ext cx="4297680" cy="1594612"/>
-          </a:xfrm>
-          <a:prstGeom prst="roundRect">
-            <a:avLst>
-              <a:gd name="adj" fmla="val 4587"/>
-            </a:avLst>
-          </a:prstGeom>
-          <a:solidFill>
-            <a:srgbClr val="111111"/>
-          </a:solidFill>
-          <a:ln/>
-        </p:spPr>
-      </p:sp>
-      <p:sp>
-        <p:nvSpPr>
-          <p:cNvPr id="5" name="Text 3"/>
-          <p:cNvSpPr txBox="1"/>
-          <p:nvPr/>
-        </p:nvSpPr>
-        <p:spPr>
-          <a:xfrm>
-            <a:off x="7424928" y="1938528"/>
-            <a:ext cx="3895344" cy="1192276"/>
-          </a:xfrm>
-          <a:prstGeom prst="rect">
-            <a:avLst/>
-          </a:prstGeom>
-          <a:noFill/>
-          <a:ln/>
-        </p:spPr>
-        <p:txBody>
-          <a:bodyPr wrap="square" lIns="0" tIns="0" rIns="0" bIns="0" rtlCol="0" anchor="t"/>
-          <a:lstStyle/>
-          <a:p>
-            <a:pPr algn="l" indent="0" marL="0">
-              <a:lnSpc>
-                <a:spcPts val="1820"/>
-              </a:lnSpc>
-              <a:buNone/>
-            </a:pPr>
-            <a:r>
-              <a:rPr lang="en-US" sz="1400" dirty="0">
-                <a:solidFill>
-                  <a:srgbClr val="FFFFFF"/>
-                </a:solidFill>
-                <a:latin typeface="Courier New" pitchFamily="34" charset="0"/>
-                <a:ea typeface="Courier New" pitchFamily="34" charset="-122"/>
-                <a:cs typeface="Courier New" pitchFamily="34" charset="-120"/>
-              </a:rPr>
-              <a:t>shop[</a:t>
-            </a:r>
-            <a:pPr algn="l" indent="0" marL="0">
-              <a:lnSpc>
-                <a:spcPts val="1820"/>
-              </a:lnSpc>
-              <a:buNone/>
-            </a:pPr>
-            <a:r>
-              <a:rPr lang="en-US" sz="1400" dirty="0">
-                <a:solidFill>
-                  <a:srgbClr val="E0BE36"/>
-                </a:solidFill>
-                <a:latin typeface="Courier New" pitchFamily="34" charset="0"/>
-                <a:ea typeface="Courier New" pitchFamily="34" charset="-122"/>
-                <a:cs typeface="Courier New" pitchFamily="34" charset="-120"/>
-              </a:rPr>
-              <a:t>"revenue_ugx"</a:t>
-            </a:r>
-            <a:pPr algn="l" indent="0" marL="0">
-              <a:lnSpc>
-                <a:spcPts val="1820"/>
-              </a:lnSpc>
-              <a:buNone/>
-            </a:pPr>
-            <a:r>
-              <a:rPr lang="en-US" sz="1400" dirty="0">
-                <a:solidFill>
-                  <a:srgbClr val="FFFFFF"/>
-                </a:solidFill>
-                <a:latin typeface="Courier New" pitchFamily="34" charset="0"/>
-                <a:ea typeface="Courier New" pitchFamily="34" charset="-122"/>
-                <a:cs typeface="Courier New" pitchFamily="34" charset="-120"/>
-              </a:rPr>
-              <a:t>] = shop[</a:t>
-            </a:r>
-            <a:endParaRPr lang="en-US" sz="1400" dirty="0"/>
-          </a:p>
-          <a:p>
-            <a:pPr algn="l" indent="0" marL="0">
-              <a:lnSpc>
-                <a:spcPts val="1820"/>
-              </a:lnSpc>
-              <a:buNone/>
-            </a:pPr>
-            <a:r>
-              <a:rPr lang="en-US" sz="1400" dirty="0">
-                <a:solidFill>
-                  <a:srgbClr val="FFFFFF"/>
-                </a:solidFill>
-                <a:latin typeface="Courier New" pitchFamily="34" charset="0"/>
-                <a:ea typeface="Courier New" pitchFamily="34" charset="-122"/>
-                <a:cs typeface="Courier New" pitchFamily="34" charset="-120"/>
-              </a:rPr>
-              <a:t>    </a:t>
-            </a:r>
-            <a:pPr algn="l" indent="0" marL="0">
-              <a:lnSpc>
-                <a:spcPts val="1820"/>
-              </a:lnSpc>
-              <a:buNone/>
-            </a:pPr>
-            <a:r>
-              <a:rPr lang="en-US" sz="1400" dirty="0">
-                <a:solidFill>
-                  <a:srgbClr val="E0BE36"/>
-                </a:solidFill>
-                <a:latin typeface="Courier New" pitchFamily="34" charset="0"/>
-                <a:ea typeface="Courier New" pitchFamily="34" charset="-122"/>
-                <a:cs typeface="Courier New" pitchFamily="34" charset="-120"/>
-              </a:rPr>
-              <a:t>"units"</a:t>
-            </a:r>
-            <a:endParaRPr lang="en-US" sz="1400" dirty="0"/>
-          </a:p>
-          <a:p>
-            <a:pPr algn="l" indent="0" marL="0">
-              <a:lnSpc>
-                <a:spcPts val="1820"/>
-              </a:lnSpc>
-              <a:buNone/>
-            </a:pPr>
-            <a:r>
-              <a:rPr lang="en-US" sz="1400" dirty="0">
-                <a:solidFill>
-                  <a:srgbClr val="FFFFFF"/>
-                </a:solidFill>
-                <a:latin typeface="Courier New" pitchFamily="34" charset="0"/>
-                <a:ea typeface="Courier New" pitchFamily="34" charset="-122"/>
-                <a:cs typeface="Courier New" pitchFamily="34" charset="-120"/>
-              </a:rPr>
-              <a:t>] * shop[</a:t>
-            </a:r>
-            <a:pPr algn="l" indent="0" marL="0">
-              <a:lnSpc>
-                <a:spcPts val="1820"/>
-              </a:lnSpc>
-              <a:buNone/>
-            </a:pPr>
-            <a:r>
-              <a:rPr lang="en-US" sz="1400" dirty="0">
-                <a:solidFill>
-                  <a:srgbClr val="E0BE36"/>
-                </a:solidFill>
-                <a:latin typeface="Courier New" pitchFamily="34" charset="0"/>
-                <a:ea typeface="Courier New" pitchFamily="34" charset="-122"/>
-                <a:cs typeface="Courier New" pitchFamily="34" charset="-120"/>
-              </a:rPr>
-              <a:t>"unit_price_ugx"</a:t>
-            </a:r>
-            <a:pPr algn="l" indent="0" marL="0">
-              <a:lnSpc>
-                <a:spcPts val="1820"/>
-              </a:lnSpc>
-              <a:buNone/>
-            </a:pPr>
-            <a:r>
-              <a:rPr lang="en-US" sz="1400" dirty="0">
-                <a:solidFill>
-                  <a:srgbClr val="FFFFFF"/>
-                </a:solidFill>
-                <a:latin typeface="Courier New" pitchFamily="34" charset="0"/>
-                <a:ea typeface="Courier New" pitchFamily="34" charset="-122"/>
-                <a:cs typeface="Courier New" pitchFamily="34" charset="-120"/>
-              </a:rPr>
-              <a:t>]</a:t>
-            </a:r>
-            <a:endParaRPr lang="en-US" sz="1400" dirty="0"/>
-          </a:p>
-          <a:p>
-            <a:pPr algn="l" indent="0" marL="0">
-              <a:lnSpc>
-                <a:spcPts val="1820"/>
-              </a:lnSpc>
-              <a:buNone/>
-            </a:pPr>
-            <a:r>
-              <a:rPr lang="en-US" sz="1400" dirty="0">
-                <a:solidFill>
-                  <a:srgbClr val="FFFFFF"/>
-                </a:solidFill>
-                <a:latin typeface="Courier New" pitchFamily="34" charset="0"/>
-                <a:ea typeface="Courier New" pitchFamily="34" charset="-122"/>
-                <a:cs typeface="Courier New" pitchFamily="34" charset="-120"/>
-              </a:rPr>
-              <a:t>print(shop.head(3))</a:t>
-            </a:r>
-            <a:endParaRPr lang="en-US" sz="1400" dirty="0"/>
-          </a:p>
-          <a:p>
-            <a:pPr algn="l" indent="0" marL="0">
-              <a:lnSpc>
-                <a:spcPts val="1820"/>
-              </a:lnSpc>
-              <a:buNone/>
-            </a:pPr>
-            <a:r>
-              <a:rPr lang="en-US" sz="1400" dirty="0">
-                <a:solidFill>
-                  <a:srgbClr val="FFFFFF"/>
-                </a:solidFill>
-                <a:latin typeface="Courier New" pitchFamily="34" charset="0"/>
-                <a:ea typeface="Courier New" pitchFamily="34" charset="-122"/>
-                <a:cs typeface="Courier New" pitchFamily="34" charset="-120"/>
-              </a:rPr>
-              <a:t>print(shop[</a:t>
-            </a:r>
-            <a:pPr algn="l" indent="0" marL="0">
-              <a:lnSpc>
-                <a:spcPts val="1820"/>
-              </a:lnSpc>
-              <a:buNone/>
-            </a:pPr>
-            <a:r>
-              <a:rPr lang="en-US" sz="1400" dirty="0">
-                <a:solidFill>
-                  <a:srgbClr val="E0BE36"/>
-                </a:solidFill>
-                <a:latin typeface="Courier New" pitchFamily="34" charset="0"/>
-                <a:ea typeface="Courier New" pitchFamily="34" charset="-122"/>
-                <a:cs typeface="Courier New" pitchFamily="34" charset="-120"/>
-              </a:rPr>
-              <a:t>"revenue_ugx"</a:t>
-            </a:r>
-            <a:pPr algn="l" indent="0" marL="0">
-              <a:lnSpc>
-                <a:spcPts val="1820"/>
-              </a:lnSpc>
-              <a:buNone/>
-            </a:pPr>
-            <a:r>
-              <a:rPr lang="en-US" sz="1400" dirty="0">
-                <a:solidFill>
-                  <a:srgbClr val="FFFFFF"/>
-                </a:solidFill>
-                <a:latin typeface="Courier New" pitchFamily="34" charset="0"/>
-                <a:ea typeface="Courier New" pitchFamily="34" charset="-122"/>
-                <a:cs typeface="Courier New" pitchFamily="34" charset="-120"/>
-              </a:rPr>
-              <a:t>].sum())</a:t>
-            </a:r>
-            <a:endParaRPr lang="en-US" sz="1400" dirty="0"/>
-          </a:p>
-        </p:txBody>
-      </p:sp>
+        </p:nvPicPr>
+        <p:blipFill>
+          <a:blip r:embed="rId1"/>
+          <a:stretch>
+            <a:fillRect/>
+          </a:stretch>
+        </p:blipFill>
+        <p:spPr>
+          <a:xfrm>
+            <a:off x="9418320" y="2103120"/>
+            <a:ext cx="1828800" cy="1828800"/>
+          </a:xfrm>
+          <a:prstGeom prst="rect">
+            <a:avLst/>
+          </a:prstGeom>
+        </p:spPr>
+      </p:pic>
       <p:sp>
         <p:nvSpPr>
           <p:cNvPr id="25" name="Slide Number Placeholder 0"/>
@@ -6478,15 +6256,15 @@
           <a:p>
             <a:pPr algn="l" indent="0" marL="0">
               <a:lnSpc>
-                <a:spcPts val="3600"/>
+                <a:spcPts val="3240"/>
               </a:lnSpc>
               <a:spcAft>
-                <a:spcPts val="2520"/>
+                <a:spcPts val="2020"/>
               </a:spcAft>
               <a:buNone/>
             </a:pPr>
             <a:r>
-              <a:rPr lang="en-US" sz="3000" dirty="0">
+              <a:rPr lang="en-US" sz="2700" dirty="0">
                 <a:solidFill>
                   <a:srgbClr val="111111"/>
                 </a:solidFill>
@@ -6494,22 +6272,22 @@
                 <a:ea typeface="Lato" pitchFamily="34" charset="-122"/>
                 <a:cs typeface="Lato" pitchFamily="34" charset="-120"/>
               </a:rPr>
-              <a:t>Keep the Pen sales that have 4 units or more. Count them and add up the revenue they bring in. Say why the count and the revenue are different quantities.</a:t>
-            </a:r>
-            <a:endParaRPr lang="en-US" sz="3000" dirty="0"/>
+              <a:t>Keep the Pen sales that have 4 units or more.</a:t>
+            </a:r>
+            <a:endParaRPr lang="en-US" sz="2700" dirty="0"/>
           </a:p>
           <a:p>
             <a:pPr algn="l" indent="0" marL="0">
               <a:lnSpc>
-                <a:spcPts val="3600"/>
+                <a:spcPts val="3240"/>
               </a:lnSpc>
               <a:spcAft>
-                <a:spcPts val="2520"/>
+                <a:spcPts val="2020"/>
               </a:spcAft>
               <a:buNone/>
             </a:pPr>
             <a:r>
-              <a:rPr lang="en-US" sz="3000" dirty="0">
+              <a:rPr lang="en-US" sz="2700" dirty="0">
                 <a:solidFill>
                   <a:srgbClr val="111111"/>
                 </a:solidFill>
@@ -6517,9 +6295,55 @@
                 <a:ea typeface="Lato" pitchFamily="34" charset="-122"/>
                 <a:cs typeface="Lato" pitchFamily="34" charset="-120"/>
               </a:rPr>
+              <a:t>Count them and add up the revenue they bring in.</a:t>
+            </a:r>
+            <a:endParaRPr lang="en-US" sz="2700" dirty="0"/>
+          </a:p>
+          <a:p>
+            <a:pPr algn="l" indent="0" marL="0">
+              <a:lnSpc>
+                <a:spcPts val="3240"/>
+              </a:lnSpc>
+              <a:spcAft>
+                <a:spcPts val="2020"/>
+              </a:spcAft>
+              <a:buNone/>
+            </a:pPr>
+            <a:r>
+              <a:rPr lang="en-US" sz="2700" dirty="0">
+                <a:solidFill>
+                  <a:srgbClr val="111111"/>
+                </a:solidFill>
+                <a:latin typeface="Lato" pitchFamily="34" charset="0"/>
+                <a:ea typeface="Lato" pitchFamily="34" charset="-122"/>
+                <a:cs typeface="Lato" pitchFamily="34" charset="-120"/>
+              </a:rPr>
+              <a:t>Say why the count and the revenue are different quantities.</a:t>
+            </a:r>
+            <a:endParaRPr lang="en-US" sz="2700" dirty="0"/>
+          </a:p>
+          <a:p>
+            <a:pPr algn="l" indent="0" marL="0">
+              <a:lnSpc>
+                <a:spcPts val="3240"/>
+              </a:lnSpc>
+              <a:spcAft>
+                <a:spcPts val="2020"/>
+              </a:spcAft>
+              <a:buNone/>
+            </a:pPr>
+            <a:r>
+              <a:rPr lang="en-US" sz="2700" dirty="0">
+                <a:solidFill>
+                  <a:srgbClr val="111111"/>
+                </a:solidFill>
+                <a:latin typeface="Lato" pitchFamily="34" charset="0"/>
+                <a:ea typeface="Lato" pitchFamily="34" charset="-122"/>
+                <a:cs typeface="Lato" pitchFamily="34" charset="-120"/>
+              </a:rPr>
               <a:t>Save it as DA08. Write two sentences: what you changed and how you checked it.</a:t>
             </a:r>
-            <a:endParaRPr lang="en-US" sz="3000" dirty="0"/>
+            <a:endParaRPr lang="en-US" sz="2700" dirty="0"/>
           </a:p>
         </p:txBody>
       </p:sp>
